--- a/docs/presentation.pptx
+++ b/docs/presentation.pptx
@@ -3136,7 +3136,7 @@
               </a:defRPr>
             </a:pPr>
             <a:r>
-              <a:t>S&amp;P Global &amp; CRISIL Campus Hackathon 2026 | Candidate: Rudra Singla | Techno India NJR Institute of Technology</a:t>
+              <a:t>S&amp;P Global &amp; CRISIL Campus Hackathon 2026 | Candidate: Harshita Singla | Indira Gandhi Delhi Technical University for Women</a:t>
             </a:r>
           </a:p>
         </p:txBody>
